--- a/test-corpus/word-verification/git-graph.pptx
+++ b/test-corpus/word-verification/git-graph.pptx
@@ -144,13 +144,13 @@
         </p:nvCxnSpPr>
         <p:spPr>
           <a:xfrm>
-            <a:off x="1248709" y="3188175"/>
-            <a:ext cx="1077176" cy="1053150"/>
+            <a:off x="950930" y="3386281"/>
+            <a:ext cx="671925" cy="656939"/>
           </a:xfrm>
           <a:prstGeom prst="line">
             <a:avLst/>
           </a:prstGeom>
-          <a:ln w="16455">
+          <a:ln w="10265">
             <a:solidFill>
               <a:srgbClr val="4472C4"/>
             </a:solidFill>
@@ -166,13 +166,13 @@
         </p:nvCxnSpPr>
         <p:spPr>
           <a:xfrm>
-            <a:off x="1248709" y="3188175"/>
-            <a:ext cx="2154351" cy="1"/>
+            <a:off x="950930" y="3386281"/>
+            <a:ext cx="1343850" cy="1"/>
           </a:xfrm>
           <a:prstGeom prst="line">
             <a:avLst/>
           </a:prstGeom>
-          <a:ln w="16455">
+          <a:ln w="10265">
             <a:solidFill>
               <a:srgbClr val="4472C4"/>
             </a:solidFill>
@@ -188,13 +188,13 @@
         </p:nvCxnSpPr>
         <p:spPr>
           <a:xfrm>
-            <a:off x="1248709" y="3188175"/>
-            <a:ext cx="3231527" cy="526575"/>
+            <a:off x="950930" y="3386281"/>
+            <a:ext cx="2015775" cy="328469"/>
           </a:xfrm>
           <a:prstGeom prst="line">
             <a:avLst/>
           </a:prstGeom>
-          <a:ln w="16455">
+          <a:ln w="10265">
             <a:solidFill>
               <a:srgbClr val="4472C4"/>
             </a:solidFill>
@@ -210,13 +210,13 @@
         </p:nvCxnSpPr>
         <p:spPr>
           <a:xfrm>
-            <a:off x="3403060" y="3188175"/>
-            <a:ext cx="2154352" cy="1"/>
+            <a:off x="2294780" y="3386281"/>
+            <a:ext cx="1343850" cy="1"/>
           </a:xfrm>
           <a:prstGeom prst="line">
             <a:avLst/>
           </a:prstGeom>
-          <a:ln w="16455">
+          <a:ln w="10265">
             <a:solidFill>
               <a:srgbClr val="4472C4"/>
             </a:solidFill>
@@ -232,13 +232,13 @@
         </p:nvCxnSpPr>
         <p:spPr>
           <a:xfrm flipV="1">
-            <a:off x="4480236" y="3188175"/>
-            <a:ext cx="1077176" cy="526575"/>
+            <a:off x="2966705" y="3386281"/>
+            <a:ext cx="671925" cy="328469"/>
           </a:xfrm>
           <a:prstGeom prst="line">
             <a:avLst/>
           </a:prstGeom>
-          <a:ln w="16455">
+          <a:ln w="10265">
             <a:solidFill>
               <a:srgbClr val="ED7D31"/>
             </a:solidFill>
@@ -254,13 +254,13 @@
         </p:nvCxnSpPr>
         <p:spPr>
           <a:xfrm>
-            <a:off x="5557412" y="3188175"/>
-            <a:ext cx="1077176" cy="1"/>
+            <a:off x="3638630" y="3386281"/>
+            <a:ext cx="671924" cy="1"/>
           </a:xfrm>
           <a:prstGeom prst="line">
             <a:avLst/>
           </a:prstGeom>
-          <a:ln w="16455">
+          <a:ln w="10265">
             <a:solidFill>
               <a:srgbClr val="4472C4"/>
             </a:solidFill>
@@ -276,13 +276,13 @@
         </p:nvCxnSpPr>
         <p:spPr>
           <a:xfrm>
-            <a:off x="2325885" y="4241325"/>
-            <a:ext cx="5385879" cy="1"/>
+            <a:off x="1622855" y="4043220"/>
+            <a:ext cx="3359624" cy="1"/>
           </a:xfrm>
           <a:prstGeom prst="line">
             <a:avLst/>
           </a:prstGeom>
-          <a:ln w="16455">
+          <a:ln w="10265">
             <a:solidFill>
               <a:srgbClr val="70AD47"/>
             </a:solidFill>
@@ -298,13 +298,13 @@
         </p:nvCxnSpPr>
         <p:spPr>
           <a:xfrm>
-            <a:off x="5557412" y="3188175"/>
-            <a:ext cx="2154352" cy="1053150"/>
+            <a:off x="3638630" y="3386281"/>
+            <a:ext cx="1343849" cy="656939"/>
           </a:xfrm>
           <a:prstGeom prst="line">
             <a:avLst/>
           </a:prstGeom>
-          <a:ln w="8228">
+          <a:ln w="5132">
             <a:solidFill>
               <a:srgbClr val="808080"/>
             </a:solidFill>
@@ -320,13 +320,13 @@
         </p:nvCxnSpPr>
         <p:spPr>
           <a:xfrm>
-            <a:off x="7711764" y="4241325"/>
-            <a:ext cx="1077176" cy="1"/>
+            <a:off x="4982479" y="4043220"/>
+            <a:ext cx="671925" cy="1"/>
           </a:xfrm>
           <a:prstGeom prst="line">
             <a:avLst/>
           </a:prstGeom>
-          <a:ln w="16455">
+          <a:ln w="10265">
             <a:solidFill>
               <a:srgbClr val="70AD47"/>
             </a:solidFill>
@@ -342,13 +342,13 @@
         </p:nvCxnSpPr>
         <p:spPr>
           <a:xfrm>
-            <a:off x="4480236" y="3714750"/>
-            <a:ext cx="5385879" cy="1"/>
+            <a:off x="2966705" y="3714750"/>
+            <a:ext cx="3359624" cy="1"/>
           </a:xfrm>
           <a:prstGeom prst="line">
             <a:avLst/>
           </a:prstGeom>
-          <a:ln w="16455">
+          <a:ln w="10265">
             <a:solidFill>
               <a:srgbClr val="ED7D31"/>
             </a:solidFill>
@@ -364,8 +364,8 @@
         </p:nvSpPr>
         <p:spPr>
           <a:xfrm>
-            <a:off x="1182887" y="3122353"/>
-            <a:ext cx="131644" cy="131644"/>
+            <a:off x="909871" y="3345222"/>
+            <a:ext cx="82118" cy="82118"/>
           </a:xfrm>
           <a:prstGeom prst="ellipse">
             <a:avLst/>
@@ -388,8 +388,8 @@
         </p:nvSpPr>
         <p:spPr>
           <a:xfrm>
-            <a:off x="1112128" y="3303363"/>
-            <a:ext cx="273161" cy="131644"/>
+            <a:off x="865734" y="3458134"/>
+            <a:ext cx="170393" cy="82117"/>
           </a:xfrm>
           <a:prstGeom prst="rect">
             <a:avLst/>
@@ -412,7 +412,7 @@
               </a:spcAft>
             </a:pPr>
             <a:r>
-              <a:rPr lang="en-US" sz="650" dirty="0">
+              <a:rPr lang="en-US" sz="400" dirty="0">
                 <a:solidFill>
                   <a:srgbClr val="404040"/>
                 </a:solidFill>
@@ -430,8 +430,8 @@
         </p:nvSpPr>
         <p:spPr>
           <a:xfrm>
-            <a:off x="2260063" y="4175503"/>
-            <a:ext cx="131644" cy="131644"/>
+            <a:off x="1581796" y="4002161"/>
+            <a:ext cx="82118" cy="82118"/>
           </a:xfrm>
           <a:prstGeom prst="ellipse">
             <a:avLst/>
@@ -454,8 +454,8 @@
         </p:nvSpPr>
         <p:spPr>
           <a:xfrm>
-            <a:off x="2267056" y="4356514"/>
-            <a:ext cx="117657" cy="131644"/>
+            <a:off x="1586159" y="4115072"/>
+            <a:ext cx="73392" cy="82117"/>
           </a:xfrm>
           <a:prstGeom prst="rect">
             <a:avLst/>
@@ -478,7 +478,7 @@
               </a:spcAft>
             </a:pPr>
             <a:r>
-              <a:rPr lang="en-US" sz="650" dirty="0">
+              <a:rPr lang="en-US" sz="400" dirty="0">
                 <a:solidFill>
                   <a:srgbClr val="404040"/>
                 </a:solidFill>
@@ -496,8 +496,8 @@
         </p:nvSpPr>
         <p:spPr>
           <a:xfrm>
-            <a:off x="3337238" y="3122353"/>
-            <a:ext cx="131644" cy="131644"/>
+            <a:off x="2253721" y="3345222"/>
+            <a:ext cx="82118" cy="82118"/>
           </a:xfrm>
           <a:prstGeom prst="ellipse">
             <a:avLst/>
@@ -520,8 +520,8 @@
         </p:nvSpPr>
         <p:spPr>
           <a:xfrm>
-            <a:off x="3292397" y="3303363"/>
-            <a:ext cx="221326" cy="131644"/>
+            <a:off x="2225750" y="3458134"/>
+            <a:ext cx="138060" cy="82117"/>
           </a:xfrm>
           <a:prstGeom prst="rect">
             <a:avLst/>
@@ -544,7 +544,7 @@
               </a:spcAft>
             </a:pPr>
             <a:r>
-              <a:rPr lang="en-US" sz="650" dirty="0">
+              <a:rPr lang="en-US" sz="400" dirty="0">
                 <a:solidFill>
                   <a:srgbClr val="404040"/>
                 </a:solidFill>
@@ -562,8 +562,8 @@
         </p:nvSpPr>
         <p:spPr>
           <a:xfrm>
-            <a:off x="4414414" y="3648928"/>
-            <a:ext cx="131644" cy="131644"/>
+            <a:off x="2925646" y="3673691"/>
+            <a:ext cx="82118" cy="82118"/>
           </a:xfrm>
           <a:prstGeom prst="ellipse">
             <a:avLst/>
@@ -586,8 +586,8 @@
         </p:nvSpPr>
         <p:spPr>
           <a:xfrm>
-            <a:off x="4421408" y="3829938"/>
-            <a:ext cx="117657" cy="131644"/>
+            <a:off x="2930009" y="3786603"/>
+            <a:ext cx="73392" cy="82117"/>
           </a:xfrm>
           <a:prstGeom prst="rect">
             <a:avLst/>
@@ -610,7 +610,7 @@
               </a:spcAft>
             </a:pPr>
             <a:r>
-              <a:rPr lang="en-US" sz="650" dirty="0">
+              <a:rPr lang="en-US" sz="400" dirty="0">
                 <a:solidFill>
                   <a:srgbClr val="404040"/>
                 </a:solidFill>
@@ -628,8 +628,8 @@
         </p:nvSpPr>
         <p:spPr>
           <a:xfrm>
-            <a:off x="5491590" y="3122353"/>
-            <a:ext cx="131644" cy="131644"/>
+            <a:off x="3597571" y="3345222"/>
+            <a:ext cx="82118" cy="82118"/>
           </a:xfrm>
           <a:prstGeom prst="ellipse">
             <a:avLst/>
@@ -652,8 +652,8 @@
         </p:nvSpPr>
         <p:spPr>
           <a:xfrm>
-            <a:off x="5524501" y="3155264"/>
-            <a:ext cx="65822" cy="65822"/>
+            <a:off x="3618100" y="3365751"/>
+            <a:ext cx="41060" cy="41060"/>
           </a:xfrm>
           <a:prstGeom prst="ellipse">
             <a:avLst/>
@@ -676,8 +676,8 @@
         </p:nvSpPr>
         <p:spPr>
           <a:xfrm>
-            <a:off x="5394914" y="3303363"/>
-            <a:ext cx="324996" cy="131644"/>
+            <a:off x="3537266" y="3458134"/>
+            <a:ext cx="202727" cy="82117"/>
           </a:xfrm>
           <a:prstGeom prst="rect">
             <a:avLst/>
@@ -700,7 +700,7 @@
               </a:spcAft>
             </a:pPr>
             <a:r>
-              <a:rPr lang="en-US" sz="650" dirty="0">
+              <a:rPr lang="en-US" sz="400" dirty="0">
                 <a:solidFill>
                   <a:srgbClr val="404040"/>
                 </a:solidFill>
@@ -718,8 +718,8 @@
         </p:nvSpPr>
         <p:spPr>
           <a:xfrm>
-            <a:off x="6568766" y="3122353"/>
-            <a:ext cx="131644" cy="131644"/>
+            <a:off x="4269495" y="3345222"/>
+            <a:ext cx="82118" cy="82118"/>
           </a:xfrm>
           <a:prstGeom prst="ellipse">
             <a:avLst/>
@@ -742,8 +742,8 @@
         </p:nvSpPr>
         <p:spPr>
           <a:xfrm>
-            <a:off x="6523925" y="3303363"/>
-            <a:ext cx="221326" cy="131644"/>
+            <a:off x="4241525" y="3458134"/>
+            <a:ext cx="138060" cy="82117"/>
           </a:xfrm>
           <a:prstGeom prst="rect">
             <a:avLst/>
@@ -766,7 +766,7 @@
               </a:spcAft>
             </a:pPr>
             <a:r>
-              <a:rPr lang="en-US" sz="650" dirty="0">
+              <a:rPr lang="en-US" sz="400" dirty="0">
                 <a:solidFill>
                   <a:srgbClr val="404040"/>
                 </a:solidFill>
@@ -784,8 +784,8 @@
         </p:nvSpPr>
         <p:spPr>
           <a:xfrm>
-            <a:off x="7645942" y="4175503"/>
-            <a:ext cx="131644" cy="131644"/>
+            <a:off x="4941420" y="4002161"/>
+            <a:ext cx="82118" cy="82118"/>
           </a:xfrm>
           <a:prstGeom prst="ellipse">
             <a:avLst/>
@@ -808,8 +808,8 @@
         </p:nvSpPr>
         <p:spPr>
           <a:xfrm>
-            <a:off x="6742865" y="4356514"/>
-            <a:ext cx="1937798" cy="131644"/>
+            <a:off x="4378096" y="4115072"/>
+            <a:ext cx="1208767" cy="82117"/>
           </a:xfrm>
           <a:prstGeom prst="rect">
             <a:avLst/>
@@ -832,7 +832,7 @@
               </a:spcAft>
             </a:pPr>
             <a:r>
-              <a:rPr lang="en-US" sz="650" dirty="0">
+              <a:rPr lang="en-US" sz="400" dirty="0">
                 <a:solidFill>
                   <a:srgbClr val="404040"/>
                 </a:solidFill>
@@ -850,8 +850,8 @@
         </p:nvSpPr>
         <p:spPr>
           <a:xfrm>
-            <a:off x="8723118" y="4175503"/>
-            <a:ext cx="131644" cy="131644"/>
+            <a:off x="5613345" y="4002161"/>
+            <a:ext cx="82118" cy="82118"/>
           </a:xfrm>
           <a:prstGeom prst="ellipse">
             <a:avLst/>
@@ -874,8 +874,8 @@
         </p:nvSpPr>
         <p:spPr>
           <a:xfrm>
-            <a:off x="8626442" y="4356514"/>
-            <a:ext cx="324996" cy="131644"/>
+            <a:off x="5553041" y="4115072"/>
+            <a:ext cx="202727" cy="82117"/>
           </a:xfrm>
           <a:prstGeom prst="rect">
             <a:avLst/>
@@ -898,7 +898,7 @@
               </a:spcAft>
             </a:pPr>
             <a:r>
-              <a:rPr lang="en-US" sz="650" dirty="0">
+              <a:rPr lang="en-US" sz="400" dirty="0">
                 <a:solidFill>
                   <a:srgbClr val="404040"/>
                 </a:solidFill>
@@ -916,8 +916,8 @@
         </p:nvSpPr>
         <p:spPr>
           <a:xfrm>
-            <a:off x="9800293" y="3648928"/>
-            <a:ext cx="131644" cy="131644"/>
+            <a:off x="6285270" y="3673691"/>
+            <a:ext cx="82118" cy="82118"/>
           </a:xfrm>
           <a:prstGeom prst="ellipse">
             <a:avLst/>
@@ -940,8 +940,8 @@
         </p:nvSpPr>
         <p:spPr>
           <a:xfrm>
-            <a:off x="9807287" y="3829938"/>
-            <a:ext cx="117657" cy="131644"/>
+            <a:off x="6289633" y="3786603"/>
+            <a:ext cx="73392" cy="82117"/>
           </a:xfrm>
           <a:prstGeom prst="rect">
             <a:avLst/>
@@ -964,7 +964,7 @@
               </a:spcAft>
             </a:pPr>
             <a:r>
-              <a:rPr lang="en-US" sz="650" dirty="0">
+              <a:rPr lang="en-US" sz="400" dirty="0">
                 <a:solidFill>
                   <a:srgbClr val="404040"/>
                 </a:solidFill>
@@ -982,8 +982,8 @@
         </p:nvSpPr>
         <p:spPr>
           <a:xfrm>
-            <a:off x="10801774" y="3122353"/>
-            <a:ext cx="283034" cy="148099"/>
+            <a:off x="6909978" y="3345223"/>
+            <a:ext cx="176552" cy="92382"/>
           </a:xfrm>
           <a:prstGeom prst="rect">
             <a:avLst/>
@@ -1006,7 +1006,7 @@
               </a:spcAft>
             </a:pPr>
             <a:r>
-              <a:rPr lang="en-US" b="1" sz="800" dirty="0">
+              <a:rPr lang="en-US" b="1" sz="500" dirty="0">
                 <a:solidFill>
                   <a:srgbClr val="4472C4"/>
                 </a:solidFill>
@@ -1024,8 +1024,8 @@
         </p:nvSpPr>
         <p:spPr>
           <a:xfrm>
-            <a:off x="10720320" y="3648928"/>
-            <a:ext cx="445944" cy="148099"/>
+            <a:off x="6859168" y="3673692"/>
+            <a:ext cx="278172" cy="92382"/>
           </a:xfrm>
           <a:prstGeom prst="rect">
             <a:avLst/>
@@ -1048,7 +1048,7 @@
               </a:spcAft>
             </a:pPr>
             <a:r>
-              <a:rPr lang="en-US" b="1" sz="800" dirty="0">
+              <a:rPr lang="en-US" b="1" sz="500" dirty="0">
                 <a:solidFill>
                   <a:srgbClr val="ED7D31"/>
                 </a:solidFill>
@@ -1066,8 +1066,8 @@
         </p:nvSpPr>
         <p:spPr>
           <a:xfrm>
-            <a:off x="10720320" y="4175504"/>
-            <a:ext cx="445944" cy="148099"/>
+            <a:off x="6859168" y="4002161"/>
+            <a:ext cx="278172" cy="92382"/>
           </a:xfrm>
           <a:prstGeom prst="rect">
             <a:avLst/>
@@ -1090,12 +1090,263 @@
               </a:spcAft>
             </a:pPr>
             <a:r>
-              <a:rPr lang="en-US" b="1" sz="800" dirty="0">
+              <a:rPr lang="en-US" b="1" sz="500" dirty="0">
                 <a:solidFill>
                   <a:srgbClr val="70AD47"/>
                 </a:solidFill>
               </a:rPr>
               <a:t>release</a:t>
+            </a:r>
+          </a:p>
+        </p:txBody>
+      </p:sp>
+      <p:sp>
+        <p:nvSpPr>
+          <p:cNvPr id="4" name="Mermaid source"/>
+          <p:cNvSpPr/>
+          <p:nvPr/>
+        </p:nvSpPr>
+        <p:spPr>
+          <a:xfrm>
+            <a:off x="7674864" y="1028700"/>
+            <a:ext cx="4059936" cy="5372100"/>
+          </a:xfrm>
+          <a:prstGeom prst="rect">
+            <a:avLst/>
+          </a:prstGeom>
+          <a:solidFill>
+            <a:srgbClr val="F3F4F6"/>
+          </a:solidFill>
+          <a:ln w="9525">
+            <a:solidFill>
+              <a:srgbClr val="D1D5DB"/>
+            </a:solidFill>
+          </a:ln>
+        </p:spPr>
+        <p:txBody>
+          <a:bodyPr wrap="square" lIns="91440" tIns="45720" rIns="91440" bIns="45720" anchor="t">
+            <a:noAutofit/>
+          </a:bodyPr>
+          <a:lstStyle/>
+          <a:p>
+            <a:pPr algn="l"/>
+            <a:r>
+              <a:rPr lang="en-US" sz="1400" dirty="0">
+                <a:solidFill>
+                  <a:srgbClr val="1F2937"/>
+                </a:solidFill>
+                <a:latin typeface="Consolas"/>
+                <a:cs typeface="Consolas"/>
+              </a:rPr>
+              <a:t>gitGraph</a:t>
+            </a:r>
+          </a:p>
+          <a:p>
+            <a:pPr algn="l"/>
+            <a:r>
+              <a:rPr lang="en-US" sz="1400" dirty="0">
+                <a:solidFill>
+                  <a:srgbClr val="1F2937"/>
+                </a:solidFill>
+                <a:latin typeface="Consolas"/>
+                <a:cs typeface="Consolas"/>
+              </a:rPr>
+              <a:t>    commit id: "ZERO"</a:t>
+            </a:r>
+          </a:p>
+          <a:p>
+            <a:pPr algn="l"/>
+            <a:r>
+              <a:rPr lang="en-US" sz="1400" dirty="0">
+                <a:solidFill>
+                  <a:srgbClr val="1F2937"/>
+                </a:solidFill>
+                <a:latin typeface="Consolas"/>
+                <a:cs typeface="Consolas"/>
+              </a:rPr>
+              <a:t>    branch develop</a:t>
+            </a:r>
+          </a:p>
+          <a:p>
+            <a:pPr algn="l"/>
+            <a:r>
+              <a:rPr lang="en-US" sz="1400" dirty="0">
+                <a:solidFill>
+                  <a:srgbClr val="1F2937"/>
+                </a:solidFill>
+                <a:latin typeface="Consolas"/>
+                <a:cs typeface="Consolas"/>
+              </a:rPr>
+              <a:t>    branch release</a:t>
+            </a:r>
+          </a:p>
+          <a:p>
+            <a:pPr algn="l"/>
+            <a:r>
+              <a:rPr lang="en-US" sz="1400" dirty="0">
+                <a:solidFill>
+                  <a:srgbClr val="1F2937"/>
+                </a:solidFill>
+                <a:latin typeface="Consolas"/>
+                <a:cs typeface="Consolas"/>
+              </a:rPr>
+              <a:t>    commit id:"A"</a:t>
+            </a:r>
+          </a:p>
+          <a:p>
+            <a:pPr algn="l"/>
+            <a:r>
+              <a:rPr lang="en-US" sz="1400" dirty="0">
+                <a:solidFill>
+                  <a:srgbClr val="1F2937"/>
+                </a:solidFill>
+                <a:latin typeface="Consolas"/>
+                <a:cs typeface="Consolas"/>
+              </a:rPr>
+              <a:t>    checkout main</a:t>
+            </a:r>
+          </a:p>
+          <a:p>
+            <a:pPr algn="l"/>
+            <a:r>
+              <a:rPr lang="en-US" sz="1400" dirty="0">
+                <a:solidFill>
+                  <a:srgbClr val="1F2937"/>
+                </a:solidFill>
+                <a:latin typeface="Consolas"/>
+                <a:cs typeface="Consolas"/>
+              </a:rPr>
+              <a:t>    commit id:"ONE"</a:t>
+            </a:r>
+          </a:p>
+          <a:p>
+            <a:pPr algn="l"/>
+            <a:r>
+              <a:rPr lang="en-US" sz="1400" dirty="0">
+                <a:solidFill>
+                  <a:srgbClr val="1F2937"/>
+                </a:solidFill>
+                <a:latin typeface="Consolas"/>
+                <a:cs typeface="Consolas"/>
+              </a:rPr>
+              <a:t>    checkout develop</a:t>
+            </a:r>
+          </a:p>
+          <a:p>
+            <a:pPr algn="l"/>
+            <a:r>
+              <a:rPr lang="en-US" sz="1400" dirty="0">
+                <a:solidFill>
+                  <a:srgbClr val="1F2937"/>
+                </a:solidFill>
+                <a:latin typeface="Consolas"/>
+                <a:cs typeface="Consolas"/>
+              </a:rPr>
+              <a:t>    commit id:"B"</a:t>
+            </a:r>
+          </a:p>
+          <a:p>
+            <a:pPr algn="l"/>
+            <a:r>
+              <a:rPr lang="en-US" sz="1400" dirty="0">
+                <a:solidFill>
+                  <a:srgbClr val="1F2937"/>
+                </a:solidFill>
+                <a:latin typeface="Consolas"/>
+                <a:cs typeface="Consolas"/>
+              </a:rPr>
+              <a:t>    checkout main</a:t>
+            </a:r>
+          </a:p>
+          <a:p>
+            <a:pPr algn="l"/>
+            <a:r>
+              <a:rPr lang="en-US" sz="1400" dirty="0">
+                <a:solidFill>
+                  <a:srgbClr val="1F2937"/>
+                </a:solidFill>
+                <a:latin typeface="Consolas"/>
+                <a:cs typeface="Consolas"/>
+              </a:rPr>
+              <a:t>    merge develop id:"MERGE"</a:t>
+            </a:r>
+          </a:p>
+          <a:p>
+            <a:pPr algn="l"/>
+            <a:r>
+              <a:rPr lang="en-US" sz="1400" dirty="0">
+                <a:solidFill>
+                  <a:srgbClr val="1F2937"/>
+                </a:solidFill>
+                <a:latin typeface="Consolas"/>
+                <a:cs typeface="Consolas"/>
+              </a:rPr>
+              <a:t>    commit id:"TWO"</a:t>
+            </a:r>
+          </a:p>
+          <a:p>
+            <a:pPr algn="l"/>
+            <a:r>
+              <a:rPr lang="en-US" sz="1400" dirty="0">
+                <a:solidFill>
+                  <a:srgbClr val="1F2937"/>
+                </a:solidFill>
+                <a:latin typeface="Consolas"/>
+                <a:cs typeface="Consolas"/>
+              </a:rPr>
+              <a:t>    checkout release</a:t>
+            </a:r>
+          </a:p>
+          <a:p>
+            <a:pPr algn="l"/>
+            <a:r>
+              <a:rPr lang="en-US" sz="1400" dirty="0">
+                <a:solidFill>
+                  <a:srgbClr val="1F2937"/>
+                </a:solidFill>
+                <a:latin typeface="Consolas"/>
+                <a:cs typeface="Consolas"/>
+              </a:rPr>
+              <a:t>    cherry-pick id:"MERGE" parent:"B"</a:t>
+            </a:r>
+          </a:p>
+          <a:p>
+            <a:pPr algn="l"/>
+            <a:r>
+              <a:rPr lang="en-US" sz="1400" dirty="0">
+                <a:solidFill>
+                  <a:srgbClr val="1F2937"/>
+                </a:solidFill>
+                <a:latin typeface="Consolas"/>
+                <a:cs typeface="Consolas"/>
+              </a:rPr>
+              <a:t>    commit id:"THREE"</a:t>
+            </a:r>
+          </a:p>
+          <a:p>
+            <a:pPr algn="l"/>
+            <a:r>
+              <a:rPr lang="en-US" sz="1400" dirty="0">
+                <a:solidFill>
+                  <a:srgbClr val="1F2937"/>
+                </a:solidFill>
+                <a:latin typeface="Consolas"/>
+                <a:cs typeface="Consolas"/>
+              </a:rPr>
+              <a:t>    checkout develop</a:t>
+            </a:r>
+          </a:p>
+          <a:p>
+            <a:pPr algn="l"/>
+            <a:r>
+              <a:rPr lang="en-US" sz="1400" dirty="0">
+                <a:solidFill>
+                  <a:srgbClr val="1F2937"/>
+                </a:solidFill>
+                <a:latin typeface="Consolas"/>
+                <a:cs typeface="Consolas"/>
+              </a:rPr>
+              <a:t>    commit id:"C"</a:t>
             </a:r>
           </a:p>
         </p:txBody>
